--- a/Group_8DesignPPt.pptx
+++ b/Group_8DesignPPt.pptx
@@ -21,7 +21,7 @@
     <p:sldId id="335" r:id="rId9"/>
     <p:sldId id="336" r:id="rId10"/>
     <p:sldId id="324" r:id="rId11"/>
-    <p:sldId id="317" r:id="rId12"/>
+    <p:sldId id="340" r:id="rId12"/>
     <p:sldId id="316" r:id="rId13"/>
     <p:sldId id="325" r:id="rId14"/>
     <p:sldId id="323" r:id="rId15"/>
@@ -249,7 +249,7 @@
             <a:fld id="{566ABCEB-ACFC-4714-9973-3DA970169C29}" type="datetime1">
               <a:rPr lang="en-IN" altLang="en-US" sz="1200"/>
               <a:pPr lvl="0" algn="r"/>
-              <a:t>16-02-2025</a:t>
+              <a:t>17-02-2025</a:t>
             </a:fld>
             <a:endParaRPr lang="en-IN" altLang="en-US" sz="1200"/>
           </a:p>
@@ -415,7 +415,7 @@
             <a:fld id="{566ABCEB-ACFC-4714-9973-3DA970169C29}" type="datetime1">
               <a:rPr lang="en-IN" altLang="en-US" sz="1200"/>
               <a:pPr lvl="0" algn="r"/>
-              <a:t>16-02-2025</a:t>
+              <a:t>17-02-2025</a:t>
             </a:fld>
             <a:endParaRPr lang="en-IN" altLang="en-US" sz="1200"/>
           </a:p>
@@ -1077,7 +1077,7 @@
                 </a:solidFill>
               </a:rPr>
               <a:pPr lvl="0" eaLnBrk="1" hangingPunct="1"/>
-              <a:t>16-02-2025</a:t>
+              <a:t>17-02-2025</a:t>
             </a:fld>
             <a:endParaRPr lang="en-IN" altLang="en-US" sz="1200">
               <a:solidFill>
@@ -1606,7 +1606,7 @@
                 </a:solidFill>
               </a:rPr>
               <a:pPr lvl="0" eaLnBrk="1" hangingPunct="1"/>
-              <a:t>16-02-2025</a:t>
+              <a:t>17-02-2025</a:t>
             </a:fld>
             <a:endParaRPr lang="en-IN" altLang="en-US" sz="1200">
               <a:solidFill>
@@ -2145,7 +2145,7 @@
                 </a:solidFill>
               </a:rPr>
               <a:pPr lvl="0" eaLnBrk="1" hangingPunct="1"/>
-              <a:t>16-02-2025</a:t>
+              <a:t>17-02-2025</a:t>
             </a:fld>
             <a:endParaRPr lang="en-IN" altLang="en-US" sz="1200">
               <a:solidFill>
@@ -2771,7 +2771,7 @@
                 </a:solidFill>
               </a:rPr>
               <a:pPr lvl="0" eaLnBrk="1" hangingPunct="1"/>
-              <a:t>16-02-2025</a:t>
+              <a:t>17-02-2025</a:t>
             </a:fld>
             <a:endParaRPr lang="en-IN" altLang="en-US" sz="1200">
               <a:solidFill>
@@ -3497,7 +3497,7 @@
                 </a:solidFill>
               </a:rPr>
               <a:pPr lvl="0" eaLnBrk="1" hangingPunct="1"/>
-              <a:t>16-02-2025</a:t>
+              <a:t>17-02-2025</a:t>
             </a:fld>
             <a:endParaRPr lang="en-IN" altLang="en-US" sz="1200">
               <a:solidFill>
@@ -4088,7 +4088,7 @@
                 </a:solidFill>
               </a:rPr>
               <a:pPr lvl="0" eaLnBrk="1" hangingPunct="1"/>
-              <a:t>16-02-2025</a:t>
+              <a:t>17-02-2025</a:t>
             </a:fld>
             <a:endParaRPr lang="en-IN" altLang="en-US" sz="1200">
               <a:solidFill>
@@ -4814,7 +4814,7 @@
                 </a:solidFill>
               </a:rPr>
               <a:pPr lvl="0" eaLnBrk="1" hangingPunct="1"/>
-              <a:t>16-02-2025</a:t>
+              <a:t>17-02-2025</a:t>
             </a:fld>
             <a:endParaRPr lang="en-IN" altLang="en-US" sz="1200">
               <a:solidFill>
@@ -5291,7 +5291,7 @@
                 </a:solidFill>
               </a:rPr>
               <a:pPr lvl="0" eaLnBrk="1" hangingPunct="1"/>
-              <a:t>16-02-2025</a:t>
+              <a:t>17-02-2025</a:t>
             </a:fld>
             <a:endParaRPr lang="en-IN" altLang="en-US" sz="1200">
               <a:solidFill>
@@ -5745,7 +5745,7 @@
                 </a:solidFill>
               </a:rPr>
               <a:pPr lvl="0" eaLnBrk="1" hangingPunct="1"/>
-              <a:t>16-02-2025</a:t>
+              <a:t>17-02-2025</a:t>
             </a:fld>
             <a:endParaRPr lang="en-IN" altLang="en-US" sz="1200">
               <a:solidFill>
@@ -6381,7 +6381,7 @@
                 </a:solidFill>
               </a:rPr>
               <a:pPr lvl="0" eaLnBrk="1" hangingPunct="1"/>
-              <a:t>16-02-2025</a:t>
+              <a:t>17-02-2025</a:t>
             </a:fld>
             <a:endParaRPr lang="en-IN" altLang="en-US" sz="1200">
               <a:solidFill>
@@ -7026,7 +7026,7 @@
                 </a:solidFill>
               </a:rPr>
               <a:pPr lvl="0" eaLnBrk="1" hangingPunct="1"/>
-              <a:t>16-02-2025</a:t>
+              <a:t>17-02-2025</a:t>
             </a:fld>
             <a:endParaRPr lang="en-IN" altLang="en-US" sz="1200">
               <a:solidFill>
@@ -7586,7 +7586,7 @@
                 </a:solidFill>
               </a:rPr>
               <a:pPr lvl="0" eaLnBrk="1" hangingPunct="1"/>
-              <a:t>16-02-2025</a:t>
+              <a:t>17-02-2025</a:t>
             </a:fld>
             <a:endParaRPr lang="en-IN" altLang="en-US" sz="1200">
               <a:solidFill>
@@ -8469,7 +8469,7 @@
       </p:sp>
       <p:pic>
         <p:nvPicPr>
-          <p:cNvPr id="8" name="Content Placeholder 7"/>
+          <p:cNvPr id="4" name="Content Placeholder 3"/>
           <p:cNvPicPr>
             <a:picLocks noGrp="1" noChangeAspect="1"/>
           </p:cNvPicPr>
@@ -8478,22 +8478,19 @@
           </p:nvPr>
         </p:nvPicPr>
         <p:blipFill>
-          <a:blip r:embed="rId2">
-            <a:extLst>
-              <a:ext uri="{28A0092B-C50C-407E-A947-70E740481C1C}">
-                <a14:useLocalDpi xmlns:a14="http://schemas.microsoft.com/office/drawing/2010/main" val="0"/>
-              </a:ext>
-            </a:extLst>
-          </a:blip>
+          <a:blip r:embed="rId2"/>
           <a:stretch>
             <a:fillRect/>
           </a:stretch>
         </p:blipFill>
         <p:spPr>
           <a:xfrm>
-            <a:off x="4655127" y="600013"/>
-            <a:ext cx="2508861" cy="5394388"/>
+            <a:off x="63606" y="937261"/>
+            <a:ext cx="11983614" cy="5057140"/>
           </a:xfrm>
+          <a:prstGeom prst="rect">
+            <a:avLst/>
+          </a:prstGeom>
         </p:spPr>
       </p:pic>
     </p:spTree>
@@ -8563,7 +8560,7 @@
       </p:sp>
       <p:pic>
         <p:nvPicPr>
-          <p:cNvPr id="6" name="Content Placeholder 5"/>
+          <p:cNvPr id="4" name="Content Placeholder 3"/>
           <p:cNvPicPr>
             <a:picLocks noGrp="1" noChangeAspect="1"/>
           </p:cNvPicPr>
@@ -8572,28 +8569,25 @@
           </p:nvPr>
         </p:nvPicPr>
         <p:blipFill>
-          <a:blip r:embed="rId2">
-            <a:extLst>
-              <a:ext uri="{28A0092B-C50C-407E-A947-70E740481C1C}">
-                <a14:useLocalDpi xmlns:a14="http://schemas.microsoft.com/office/drawing/2010/main" val="0"/>
-              </a:ext>
-            </a:extLst>
-          </a:blip>
+          <a:blip r:embed="rId2"/>
           <a:stretch>
             <a:fillRect/>
           </a:stretch>
         </p:blipFill>
         <p:spPr>
           <a:xfrm>
-            <a:off x="106199" y="1130531"/>
-            <a:ext cx="12027138" cy="4530436"/>
+            <a:off x="61732" y="0"/>
+            <a:ext cx="11983614" cy="6858000"/>
           </a:xfrm>
+          <a:prstGeom prst="rect">
+            <a:avLst/>
+          </a:prstGeom>
         </p:spPr>
       </p:pic>
     </p:spTree>
     <p:extLst>
       <p:ext uri="{BB962C8B-B14F-4D97-AF65-F5344CB8AC3E}">
-        <p14:creationId xmlns:p14="http://schemas.microsoft.com/office/powerpoint/2010/main" val="4169286913"/>
+        <p14:creationId xmlns:p14="http://schemas.microsoft.com/office/powerpoint/2010/main" val="501168099"/>
       </p:ext>
     </p:extLst>
   </p:cSld>
@@ -8870,30 +8864,6 @@
           </a:p>
         </p:txBody>
       </p:sp>
-      <p:pic>
-        <p:nvPicPr>
-          <p:cNvPr id="8" name="Picture 7"/>
-          <p:cNvPicPr>
-            <a:picLocks noChangeAspect="1"/>
-          </p:cNvPicPr>
-          <p:nvPr/>
-        </p:nvPicPr>
-        <p:blipFill>
-          <a:blip r:embed="rId2"/>
-          <a:stretch>
-            <a:fillRect/>
-          </a:stretch>
-        </p:blipFill>
-        <p:spPr>
-          <a:xfrm>
-            <a:off x="3275215" y="647963"/>
-            <a:ext cx="4729941" cy="5790803"/>
-          </a:xfrm>
-          <a:prstGeom prst="rect">
-            <a:avLst/>
-          </a:prstGeom>
-        </p:spPr>
-      </p:pic>
       <p:sp>
         <p:nvSpPr>
           <p:cNvPr id="10" name="Rectangle 9"/>
@@ -8938,6 +8908,30 @@
           </a:p>
         </p:txBody>
       </p:sp>
+      <p:pic>
+        <p:nvPicPr>
+          <p:cNvPr id="2" name="Picture 1"/>
+          <p:cNvPicPr>
+            <a:picLocks noChangeAspect="1"/>
+          </p:cNvPicPr>
+          <p:nvPr/>
+        </p:nvPicPr>
+        <p:blipFill>
+          <a:blip r:embed="rId2"/>
+          <a:stretch>
+            <a:fillRect/>
+          </a:stretch>
+        </p:blipFill>
+        <p:spPr>
+          <a:xfrm>
+            <a:off x="2858947" y="797898"/>
+            <a:ext cx="6886938" cy="5597756"/>
+          </a:xfrm>
+          <a:prstGeom prst="rect">
+            <a:avLst/>
+          </a:prstGeom>
+        </p:spPr>
+      </p:pic>
     </p:spTree>
     <p:extLst>
       <p:ext uri="{BB962C8B-B14F-4D97-AF65-F5344CB8AC3E}">
@@ -9003,30 +8997,6 @@
           </a:p>
         </p:txBody>
       </p:sp>
-      <p:pic>
-        <p:nvPicPr>
-          <p:cNvPr id="8" name="Picture 7"/>
-          <p:cNvPicPr>
-            <a:picLocks noChangeAspect="1"/>
-          </p:cNvPicPr>
-          <p:nvPr/>
-        </p:nvPicPr>
-        <p:blipFill>
-          <a:blip r:embed="rId2"/>
-          <a:stretch>
-            <a:fillRect/>
-          </a:stretch>
-        </p:blipFill>
-        <p:spPr>
-          <a:xfrm>
-            <a:off x="0" y="0"/>
-            <a:ext cx="12192000" cy="6886561"/>
-          </a:xfrm>
-          <a:prstGeom prst="rect">
-            <a:avLst/>
-          </a:prstGeom>
-        </p:spPr>
-      </p:pic>
       <p:sp>
         <p:nvSpPr>
           <p:cNvPr id="2" name="Rectangle 1"/>
@@ -9067,6 +9037,30 @@
           </a:p>
         </p:txBody>
       </p:sp>
+      <p:pic>
+        <p:nvPicPr>
+          <p:cNvPr id="4" name="Picture 3"/>
+          <p:cNvPicPr>
+            <a:picLocks noChangeAspect="1"/>
+          </p:cNvPicPr>
+          <p:nvPr/>
+        </p:nvPicPr>
+        <p:blipFill>
+          <a:blip r:embed="rId2"/>
+          <a:stretch>
+            <a:fillRect/>
+          </a:stretch>
+        </p:blipFill>
+        <p:spPr>
+          <a:xfrm>
+            <a:off x="0" y="0"/>
+            <a:ext cx="12191999" cy="6857999"/>
+          </a:xfrm>
+          <a:prstGeom prst="rect">
+            <a:avLst/>
+          </a:prstGeom>
+        </p:spPr>
+      </p:pic>
     </p:spTree>
     <p:extLst>
       <p:ext uri="{BB962C8B-B14F-4D97-AF65-F5344CB8AC3E}">
@@ -10618,7 +10612,7 @@
         </p:blipFill>
         <p:spPr>
           <a:xfrm>
-            <a:off x="0" y="22312"/>
+            <a:off x="17584" y="48688"/>
             <a:ext cx="12192000" cy="6863051"/>
           </a:xfrm>
         </p:spPr>
@@ -11482,7 +11476,14 @@
                 <a:latin typeface="MS Gothic" panose="020B0609070205080204" pitchFamily="49" charset="-128"/>
                 <a:ea typeface="MS Gothic" panose="020B0609070205080204" pitchFamily="49" charset="-128"/>
               </a:rPr>
-              <a:t>, or Python’s </a:t>
+              <a:t>, or </a:t>
+            </a:r>
+            <a:r>
+              <a:rPr lang="en-US" sz="2000" dirty="0" smtClean="0">
+                <a:latin typeface="MS Gothic" panose="020B0609070205080204" pitchFamily="49" charset="-128"/>
+                <a:ea typeface="MS Gothic" panose="020B0609070205080204" pitchFamily="49" charset="-128"/>
+              </a:rPr>
+              <a:t>Python’s </a:t>
             </a:r>
             <a:r>
               <a:rPr lang="en-US" sz="2000" dirty="0" err="1" smtClean="0">
